--- a/CS336_Taint_Analysis_Presentation.pptx
+++ b/CS336_Taint_Analysis_Presentation.pptx
@@ -4,6 +4,9 @@
   <p:sldMasterIdLst>
     <p:sldMasterId id="2147483648" r:id="rId1"/>
   </p:sldMasterIdLst>
+  <p:notesMasterIdLst>
+    <p:notesMasterId r:id="rId9"/>
+  </p:notesMasterIdLst>
   <p:sldIdLst>
     <p:sldId id="256" r:id="rId2"/>
     <p:sldId id="257" r:id="rId3"/>
@@ -12,12 +15,8 @@
     <p:sldId id="260" r:id="rId6"/>
     <p:sldId id="261" r:id="rId7"/>
     <p:sldId id="262" r:id="rId8"/>
-    <p:sldId id="263" r:id="rId9"/>
   </p:sldIdLst>
-  <p:notesMasterIdLst>
-    <p:notesMasterId r:id="rId10"/>
-  </p:notesMasterIdLst>
-  <p:sldSz cx="9144000" cy="5143500"/>
+  <p:sldSz cx="9144000" cy="5143500" type="screen16x9"/>
   <p:notesSz cx="5143500" cy="9144000"/>
   <p:defaultTextStyle>
     <a:lvl1pPr marL="0" algn="l" defTabSz="914400" rtl="0" eaLnBrk="1" latinLnBrk="0" hangingPunct="1">
@@ -111,7 +110,48 @@
       </a:defRPr>
     </a:lvl9pPr>
   </p:defaultTextStyle>
+  <p:extLst>
+    <p:ext uri="{EFAFB233-063F-42B5-8137-9DF3F51BA10A}">
+      <p15:sldGuideLst xmlns:p15="http://schemas.microsoft.com/office/powerpoint/2012/main"/>
+    </p:ext>
+  </p:extLst>
 </p:presentation>
+</file>
+
+<file path=ppt/changesInfos/changesInfo1.xml><?xml version="1.0" encoding="utf-8"?>
+<pc:chgInfo xmlns:a="http://schemas.openxmlformats.org/drawingml/2006/main" xmlns:r="http://schemas.openxmlformats.org/officeDocument/2006/relationships" xmlns:ac="http://schemas.microsoft.com/office/drawing/2013/main/command" xmlns:pc="http://schemas.microsoft.com/office/powerpoint/2013/main/command">
+  <pc:docChgLst>
+    <pc:chgData name="m dattilo" userId="02e58e8a81a91aa9" providerId="LiveId" clId="{3304CED0-380F-41B8-A54F-47AE7449B4F6}"/>
+    <pc:docChg chg="delSld modSld">
+      <pc:chgData name="m dattilo" userId="02e58e8a81a91aa9" providerId="LiveId" clId="{3304CED0-380F-41B8-A54F-47AE7449B4F6}" dt="2026-04-20T19:33:15.344" v="33" actId="47"/>
+      <pc:docMkLst>
+        <pc:docMk/>
+      </pc:docMkLst>
+      <pc:sldChg chg="modSp mod">
+        <pc:chgData name="m dattilo" userId="02e58e8a81a91aa9" providerId="LiveId" clId="{3304CED0-380F-41B8-A54F-47AE7449B4F6}" dt="2026-04-20T19:33:10.462" v="32" actId="20577"/>
+        <pc:sldMkLst>
+          <pc:docMk/>
+          <pc:sldMk cId="0" sldId="256"/>
+        </pc:sldMkLst>
+        <pc:spChg chg="mod">
+          <ac:chgData name="m dattilo" userId="02e58e8a81a91aa9" providerId="LiveId" clId="{3304CED0-380F-41B8-A54F-47AE7449B4F6}" dt="2026-04-20T19:33:10.462" v="32" actId="20577"/>
+          <ac:spMkLst>
+            <pc:docMk/>
+            <pc:sldMk cId="0" sldId="256"/>
+            <ac:spMk id="7" creationId="{00000000-0000-0000-0000-000000000000}"/>
+          </ac:spMkLst>
+        </pc:spChg>
+      </pc:sldChg>
+      <pc:sldChg chg="del">
+        <pc:chgData name="m dattilo" userId="02e58e8a81a91aa9" providerId="LiveId" clId="{3304CED0-380F-41B8-A54F-47AE7449B4F6}" dt="2026-04-20T19:33:15.344" v="33" actId="47"/>
+        <pc:sldMkLst>
+          <pc:docMk/>
+          <pc:sldMk cId="0" sldId="263"/>
+        </pc:sldMkLst>
+      </pc:sldChg>
+    </pc:docChg>
+  </pc:docChgLst>
+</pc:chgInfo>
 </file>
 
 <file path=ppt/notesMasters/notesMaster1.xml><?xml version="1.0" encoding="utf-8"?>
@@ -136,234 +176,10 @@
           <a:chExt cx="0" cy="0"/>
         </a:xfrm>
       </p:grpSpPr>
-      <p:sp>
-        <p:nvSpPr>
-          <p:cNvPr id="2" name="Header Placeholder 1"/>
-          <p:cNvSpPr>
-            <a:spLocks noGrp="1"/>
-          </p:cNvSpPr>
-          <p:nvPr>
-            <p:ph type="hdr" sz="quarter"/>
-          </p:nvPr>
-        </p:nvSpPr>
-        <p:spPr>
-          <a:xfrm>
-            <a:off x="0" y="0"/>
-            <a:ext cx="2971800" cy="458788"/>
-          </a:xfrm>
-          <a:prstGeom prst="rect">
-            <a:avLst/>
-          </a:prstGeom>
-        </p:spPr>
-        <p:txBody>
-          <a:bodyPr vert="horz" lIns="91440" tIns="45720" rIns="91440" bIns="45720" rtlCol="0"/>
-          <a:lstStyle>
-            <a:lvl1pPr algn="l">
-              <a:defRPr sz="1200"/>
-            </a:lvl1pPr>
-          </a:lstStyle>
-          <a:p>
-            <a:endParaRPr lang="en-US"/>
-          </a:p>
-        </p:txBody>
-      </p:sp>
-      <p:sp>
-        <p:nvSpPr>
-          <p:cNvPr id="3" name="Date Placeholder 2"/>
-          <p:cNvSpPr>
-            <a:spLocks noGrp="1"/>
-          </p:cNvSpPr>
-          <p:nvPr>
-            <p:ph type="dt" idx="1"/>
-          </p:nvPr>
-        </p:nvSpPr>
-        <p:spPr>
-          <a:xfrm>
-            <a:off x="3884613" y="0"/>
-            <a:ext cx="2971800" cy="458788"/>
-          </a:xfrm>
-          <a:prstGeom prst="rect">
-            <a:avLst/>
-          </a:prstGeom>
-        </p:spPr>
-        <p:txBody>
-          <a:bodyPr vert="horz" lIns="91440" tIns="45720" rIns="91440" bIns="45720" rtlCol="0"/>
-          <a:lstStyle>
-            <a:lvl1pPr algn="r">
-              <a:defRPr sz="1200"/>
-            </a:lvl1pPr>
-          </a:lstStyle>
-          <a:p>
-            <a:fld id="{5282F153-3F37-0F45-9E97-73ACFA13230C}" type="datetimeFigureOut">
-              <a:rPr lang="en-US"/>
-              <a:t>7/23/19</a:t>
-            </a:fld>
-            <a:endParaRPr lang="en-US"/>
-          </a:p>
-        </p:txBody>
-      </p:sp>
-      <p:sp>
-        <p:nvSpPr>
-          <p:cNvPr id="4" name="Slide Image Placeholder 3"/>
-          <p:cNvSpPr>
-            <a:spLocks noGrp="1" noRot="1" noChangeAspect="1"/>
-          </p:cNvSpPr>
-          <p:nvPr>
-            <p:ph type="sldImg" idx="2"/>
-          </p:nvPr>
-        </p:nvSpPr>
-        <p:spPr>
-          <a:xfrm>
-            <a:off x="685800" y="1143000"/>
-            <a:ext cx="5486400" cy="3086100"/>
-          </a:xfrm>
-          <a:prstGeom prst="rect">
-            <a:avLst/>
-          </a:prstGeom>
-          <a:noFill/>
-          <a:ln w="12700">
-            <a:solidFill>
-              <a:prstClr val="black"/>
-            </a:solidFill>
-          </a:ln>
-        </p:spPr>
-        <p:txBody>
-          <a:bodyPr vert="horz" lIns="91440" tIns="45720" rIns="91440" bIns="45720" rtlCol="0" anchor="ctr"/>
-          <a:lstStyle/>
-          <a:p>
-            <a:endParaRPr lang="en-US"/>
-          </a:p>
-        </p:txBody>
-      </p:sp>
-      <p:sp>
-        <p:nvSpPr>
-          <p:cNvPr id="5" name="Notes Placeholder 4"/>
-          <p:cNvSpPr>
-            <a:spLocks noGrp="1"/>
-          </p:cNvSpPr>
-          <p:nvPr>
-            <p:ph type="body" sz="quarter" idx="3"/>
-          </p:nvPr>
-        </p:nvSpPr>
-        <p:spPr>
-          <a:xfrm>
-            <a:off x="685800" y="4400550"/>
-            <a:ext cx="5486400" cy="3600450"/>
-          </a:xfrm>
-          <a:prstGeom prst="rect">
-            <a:avLst/>
-          </a:prstGeom>
-        </p:spPr>
-        <p:txBody>
-          <a:bodyPr vert="horz" lIns="91440" tIns="45720" rIns="91440" bIns="45720" rtlCol="0"/>
-          <a:lstStyle/>
-          <a:p>
-            <a:pPr lvl="0"/>
-            <a:r>
-              <a:rPr lang="en-US"/>
-              <a:t>Click to edit Master text styles</a:t>
-            </a:r>
-          </a:p>
-          <a:p>
-            <a:pPr lvl="1"/>
-            <a:r>
-              <a:rPr lang="en-US"/>
-              <a:t>Second level</a:t>
-            </a:r>
-          </a:p>
-          <a:p>
-            <a:pPr lvl="2"/>
-            <a:r>
-              <a:rPr lang="en-US"/>
-              <a:t>Third level</a:t>
-            </a:r>
-          </a:p>
-          <a:p>
-            <a:pPr lvl="3"/>
-            <a:r>
-              <a:rPr lang="en-US"/>
-              <a:t>Fourth level</a:t>
-            </a:r>
-          </a:p>
-          <a:p>
-            <a:pPr lvl="4"/>
-            <a:r>
-              <a:rPr lang="en-US"/>
-              <a:t>Fifth level</a:t>
-            </a:r>
-          </a:p>
-        </p:txBody>
-      </p:sp>
-      <p:sp>
-        <p:nvSpPr>
-          <p:cNvPr id="6" name="Footer Placeholder 5"/>
-          <p:cNvSpPr>
-            <a:spLocks noGrp="1"/>
-          </p:cNvSpPr>
-          <p:nvPr>
-            <p:ph type="ftr" sz="quarter" idx="4"/>
-          </p:nvPr>
-        </p:nvSpPr>
-        <p:spPr>
-          <a:xfrm>
-            <a:off x="0" y="8685213"/>
-            <a:ext cx="2971800" cy="458787"/>
-          </a:xfrm>
-          <a:prstGeom prst="rect">
-            <a:avLst/>
-          </a:prstGeom>
-        </p:spPr>
-        <p:txBody>
-          <a:bodyPr vert="horz" lIns="91440" tIns="45720" rIns="91440" bIns="45720" rtlCol="0" anchor="b"/>
-          <a:lstStyle>
-            <a:lvl1pPr algn="l">
-              <a:defRPr sz="1200"/>
-            </a:lvl1pPr>
-          </a:lstStyle>
-          <a:p>
-            <a:endParaRPr lang="en-US"/>
-          </a:p>
-        </p:txBody>
-      </p:sp>
-      <p:sp>
-        <p:nvSpPr>
-          <p:cNvPr id="7" name="Slide Number Placeholder 6"/>
-          <p:cNvSpPr>
-            <a:spLocks noGrp="1"/>
-          </p:cNvSpPr>
-          <p:nvPr>
-            <p:ph type="sldNum" sz="quarter" idx="5"/>
-          </p:nvPr>
-        </p:nvSpPr>
-        <p:spPr>
-          <a:xfrm>
-            <a:off x="3884613" y="8685213"/>
-            <a:ext cx="2971800" cy="458787"/>
-          </a:xfrm>
-          <a:prstGeom prst="rect">
-            <a:avLst/>
-          </a:prstGeom>
-        </p:spPr>
-        <p:txBody>
-          <a:bodyPr vert="horz" lIns="91440" tIns="45720" rIns="91440" bIns="45720" rtlCol="0" anchor="b"/>
-          <a:lstStyle>
-            <a:lvl1pPr algn="r">
-              <a:defRPr sz="1200"/>
-            </a:lvl1pPr>
-          </a:lstStyle>
-          <a:p>
-            <a:fld id="{CE5E9CC1-C706-0F49-92D6-E571CC5EEA8F}" type="slidenum">
-              <a:rPr lang="en-US"/>
-              <a:t>‹#›</a:t>
-            </a:fld>
-            <a:endParaRPr lang="en-US"/>
-          </a:p>
-        </p:txBody>
-      </p:sp>
     </p:spTree>
     <p:extLst>
       <p:ext uri="{BB962C8B-B14F-4D97-AF65-F5344CB8AC3E}">
-        <p14:creationId xmlns:p14="http://schemas.microsoft.com/office/powerpoint/2010/main" val="1024086991"/>
+        <p14:creationId xmlns:p14="http://schemas.microsoft.com/office/powerpoint/2010/main" val="833440165"/>
       </p:ext>
     </p:extLst>
   </p:cSld>
@@ -507,10 +323,6 @@
           <a:bodyPr/>
           <a:lstStyle/>
           <a:p>
-            <a:r>
-              <a:rPr lang="en-US" dirty="0"/>
-              <a:t/>
-            </a:r>
             <a:endParaRPr lang="en-US" dirty="0"/>
           </a:p>
         </p:txBody>
@@ -595,10 +407,6 @@
           <a:bodyPr/>
           <a:lstStyle/>
           <a:p>
-            <a:r>
-              <a:rPr lang="en-US" dirty="0"/>
-              <a:t/>
-            </a:r>
             <a:endParaRPr lang="en-US" dirty="0"/>
           </a:p>
         </p:txBody>
@@ -683,10 +491,6 @@
           <a:bodyPr/>
           <a:lstStyle/>
           <a:p>
-            <a:r>
-              <a:rPr lang="en-US" dirty="0"/>
-              <a:t/>
-            </a:r>
             <a:endParaRPr lang="en-US" dirty="0"/>
           </a:p>
         </p:txBody>
@@ -771,10 +575,6 @@
           <a:bodyPr/>
           <a:lstStyle/>
           <a:p>
-            <a:r>
-              <a:rPr lang="en-US" dirty="0"/>
-              <a:t/>
-            </a:r>
             <a:endParaRPr lang="en-US" dirty="0"/>
           </a:p>
         </p:txBody>
@@ -859,10 +659,6 @@
           <a:bodyPr/>
           <a:lstStyle/>
           <a:p>
-            <a:r>
-              <a:rPr lang="en-US" dirty="0"/>
-              <a:t/>
-            </a:r>
             <a:endParaRPr lang="en-US" dirty="0"/>
           </a:p>
         </p:txBody>
@@ -947,10 +743,6 @@
           <a:bodyPr/>
           <a:lstStyle/>
           <a:p>
-            <a:r>
-              <a:rPr lang="en-US" dirty="0"/>
-              <a:t/>
-            </a:r>
             <a:endParaRPr lang="en-US" dirty="0"/>
           </a:p>
         </p:txBody>
@@ -1035,10 +827,6 @@
           <a:bodyPr/>
           <a:lstStyle/>
           <a:p>
-            <a:r>
-              <a:rPr lang="en-US" dirty="0"/>
-              <a:t/>
-            </a:r>
             <a:endParaRPr lang="en-US" dirty="0"/>
           </a:p>
         </p:txBody>
@@ -1061,94 +849,6 @@
             <a:fld id="{F7021451-1387-4CA6-816F-3879F97B5CBC}" type="slidenum">
               <a:rPr lang="en-US"/>
               <a:t>7</a:t>
-            </a:fld>
-            <a:endParaRPr lang="en-US"/>
-          </a:p>
-        </p:txBody>
-      </p:sp>
-    </p:spTree>
-    <p:extLst>
-      <p:ext uri="{BB962C8B-B14F-4D97-AF65-F5344CB8AC3E}">
-        <p14:creationId xmlns:p14="http://schemas.microsoft.com/office/powerpoint/2010/main" val="1024086991"/>
-      </p:ext>
-    </p:extLst>
-  </p:cSld>
-  <p:clrMapOvr>
-    <a:masterClrMapping/>
-  </p:clrMapOvr>
-</p:notes>
-</file>
-
-<file path=ppt/notesSlides/notesSlide8.xml><?xml version="1.0" encoding="utf-8"?>
-<p:notes xmlns:a="http://schemas.openxmlformats.org/drawingml/2006/main" xmlns:r="http://schemas.openxmlformats.org/officeDocument/2006/relationships" xmlns:p="http://schemas.openxmlformats.org/presentationml/2006/main">
-  <p:cSld>
-    <p:spTree>
-      <p:nvGrpSpPr>
-        <p:cNvPr id="1" name=""/>
-        <p:cNvGrpSpPr/>
-        <p:nvPr/>
-      </p:nvGrpSpPr>
-      <p:grpSpPr>
-        <a:xfrm>
-          <a:off x="0" y="0"/>
-          <a:ext cx="0" cy="0"/>
-          <a:chOff x="0" y="0"/>
-          <a:chExt cx="0" cy="0"/>
-        </a:xfrm>
-      </p:grpSpPr>
-      <p:sp>
-        <p:nvSpPr>
-          <p:cNvPr id="2" name="Slide Image Placeholder 1"/>
-          <p:cNvSpPr>
-            <a:spLocks noGrp="1" noRot="1" noChangeAspect="1"/>
-          </p:cNvSpPr>
-          <p:nvPr>
-            <p:ph type="sldImg"/>
-          </p:nvPr>
-        </p:nvSpPr>
-        <p:spPr/>
-      </p:sp>
-      <p:sp>
-        <p:nvSpPr>
-          <p:cNvPr id="3" name="Notes Placeholder 2"/>
-          <p:cNvSpPr>
-            <a:spLocks noGrp="1"/>
-          </p:cNvSpPr>
-          <p:nvPr>
-            <p:ph type="body" idx="1"/>
-          </p:nvPr>
-        </p:nvSpPr>
-        <p:spPr/>
-        <p:txBody>
-          <a:bodyPr/>
-          <a:lstStyle/>
-          <a:p>
-            <a:r>
-              <a:rPr lang="en-US" dirty="0"/>
-              <a:t/>
-            </a:r>
-            <a:endParaRPr lang="en-US" dirty="0"/>
-          </a:p>
-        </p:txBody>
-      </p:sp>
-      <p:sp>
-        <p:nvSpPr>
-          <p:cNvPr id="4" name="Slide Number Placeholder 3"/>
-          <p:cNvSpPr>
-            <a:spLocks noGrp="1"/>
-          </p:cNvSpPr>
-          <p:nvPr>
-            <p:ph type="sldNum" sz="quarter" idx="10"/>
-          </p:nvPr>
-        </p:nvSpPr>
-        <p:spPr/>
-        <p:txBody>
-          <a:bodyPr/>
-          <a:lstStyle/>
-          <a:p>
-            <a:fld id="{F7021451-1387-4CA6-816F-3879F97B5CBC}" type="slidenum">
-              <a:rPr lang="en-US"/>
-              <a:t>8</a:t>
             </a:fld>
             <a:endParaRPr lang="en-US"/>
           </a:p>
@@ -1200,6 +900,11 @@
 <file path=ppt/slideMasters/slideMaster1.xml><?xml version="1.0" encoding="utf-8"?>
 <p:sldMaster xmlns:a="http://schemas.openxmlformats.org/drawingml/2006/main" xmlns:r="http://schemas.openxmlformats.org/officeDocument/2006/relationships" xmlns:p="http://schemas.openxmlformats.org/presentationml/2006/main">
   <p:cSld>
+    <p:bg>
+      <p:bgRef idx="1001">
+        <a:schemeClr val="bg1"/>
+      </p:bgRef>
+    </p:bg>
     <p:spTree>
       <p:nvGrpSpPr>
         <p:cNvPr id="1" name=""/>
@@ -1482,6 +1187,7 @@
         <a:solidFill>
           <a:srgbClr val="1E2761"/>
         </a:solidFill>
+        <a:effectLst/>
       </p:bgPr>
     </p:bg>
     <p:spTree>
@@ -1539,7 +1245,7 @@
           <a:bodyPr wrap="square" rtlCol="0" anchor="ctr"/>
           <a:lstStyle/>
           <a:p>
-            <a:pPr indent="0" marL="0">
+            <a:pPr marL="0" indent="0">
               <a:buNone/>
             </a:pPr>
             <a:r>
@@ -1578,7 +1284,7 @@
           <a:bodyPr wrap="square" rtlCol="0" anchor="ctr"/>
           <a:lstStyle/>
           <a:p>
-            <a:pPr indent="0" marL="0">
+            <a:pPr marL="0" indent="0">
               <a:buNone/>
             </a:pPr>
             <a:r>
@@ -1617,7 +1323,7 @@
           <a:bodyPr wrap="square" rtlCol="0" anchor="ctr"/>
           <a:lstStyle/>
           <a:p>
-            <a:pPr indent="0" marL="0">
+            <a:pPr marL="0" indent="0">
               <a:buNone/>
             </a:pPr>
             <a:r>
@@ -1656,7 +1362,7 @@
           <a:bodyPr wrap="square" rtlCol="0" anchor="ctr"/>
           <a:lstStyle/>
           <a:p>
-            <a:pPr indent="0" marL="0">
+            <a:pPr marL="0" indent="0">
               <a:buNone/>
             </a:pPr>
             <a:r>
@@ -1695,7 +1401,7 @@
           <a:bodyPr wrap="square" rtlCol="0" anchor="ctr"/>
           <a:lstStyle/>
           <a:p>
-            <a:pPr indent="0" marL="0">
+            <a:pPr marL="0" indent="0">
               <a:buNone/>
             </a:pPr>
             <a:r>
@@ -1704,10 +1410,9 @@
                   <a:srgbClr val="64748B"/>
                 </a:solidFill>
                 <a:latin typeface="Arial" pitchFamily="34" charset="0"/>
-                <a:ea typeface="Arial" pitchFamily="34" charset="-122"/>
                 <a:cs typeface="Arial" pitchFamily="34" charset="-120"/>
               </a:rPr>
-              <a:t>[Your Group Members Here]</a:t>
+              <a:t>Raul, Lynda, Baylor, Roman</a:t>
             </a:r>
             <a:endParaRPr lang="en-US" sz="1200" dirty="0"/>
           </a:p>
@@ -1729,6 +1434,7 @@
         <a:solidFill>
           <a:srgbClr val="F8FAFC"/>
         </a:solidFill>
+        <a:effectLst/>
       </p:bgPr>
     </p:bg>
     <p:spTree>
@@ -1766,7 +1472,7 @@
           <a:bodyPr wrap="square" rtlCol="0" anchor="ctr"/>
           <a:lstStyle/>
           <a:p>
-            <a:pPr indent="0" marL="0">
+            <a:pPr marL="0" indent="0">
               <a:buNone/>
             </a:pPr>
             <a:r>
@@ -1803,7 +1509,7 @@
           </a:solidFill>
           <a:ln/>
           <a:effectLst>
-            <a:outerShdw sx="100000" sy="100000" kx="0" ky="0" algn="bl" rotWithShape="0" blurRad="76200" dist="25400" dir="8100000">
+            <a:outerShdw blurRad="76200" dist="25400" dir="8100000" algn="bl" rotWithShape="0">
               <a:srgbClr val="000000">
                 <a:alpha val="12000"/>
               </a:srgbClr>
@@ -1852,7 +1558,7 @@
           <a:bodyPr wrap="square" rtlCol="0" anchor="ctr"/>
           <a:lstStyle/>
           <a:p>
-            <a:pPr indent="0" marL="0">
+            <a:pPr marL="0" indent="0">
               <a:buNone/>
             </a:pPr>
             <a:r>
@@ -1891,7 +1597,7 @@
           <a:bodyPr wrap="square" rtlCol="0" anchor="ctr"/>
           <a:lstStyle/>
           <a:p>
-            <a:pPr indent="0" marL="0">
+            <a:pPr marL="0" indent="0">
               <a:buNone/>
             </a:pPr>
             <a:r>
@@ -1908,7 +1614,7 @@
             <a:endParaRPr lang="en-US" sz="1200" dirty="0"/>
           </a:p>
           <a:p>
-            <a:pPr indent="0" marL="0">
+            <a:pPr marL="0" indent="0">
               <a:buNone/>
             </a:pPr>
             <a:r>
@@ -1967,7 +1673,7 @@
           <a:bodyPr wrap="square" rtlCol="0" anchor="ctr"/>
           <a:lstStyle/>
           <a:p>
-            <a:pPr indent="0" marL="0">
+            <a:pPr marL="0" indent="0">
               <a:buNone/>
             </a:pPr>
             <a:r>
@@ -2004,7 +1710,7 @@
           </a:solidFill>
           <a:ln/>
           <a:effectLst>
-            <a:outerShdw sx="100000" sy="100000" kx="0" ky="0" algn="bl" rotWithShape="0" blurRad="76200" dist="25400" dir="8100000">
+            <a:outerShdw blurRad="76200" dist="25400" dir="8100000" algn="bl" rotWithShape="0">
               <a:srgbClr val="000000">
                 <a:alpha val="12000"/>
               </a:srgbClr>
@@ -2053,7 +1759,7 @@
           <a:bodyPr wrap="square" rtlCol="0" anchor="ctr"/>
           <a:lstStyle/>
           <a:p>
-            <a:pPr indent="0" marL="0">
+            <a:pPr marL="0" indent="0">
               <a:buNone/>
             </a:pPr>
             <a:r>
@@ -2092,7 +1798,7 @@
           <a:bodyPr wrap="square" rtlCol="0" anchor="ctr"/>
           <a:lstStyle/>
           <a:p>
-            <a:pPr indent="0" marL="0">
+            <a:pPr marL="0" indent="0">
               <a:buNone/>
             </a:pPr>
             <a:r>
@@ -2109,7 +1815,7 @@
             <a:endParaRPr lang="en-US" sz="1200" dirty="0"/>
           </a:p>
           <a:p>
-            <a:pPr indent="0" marL="0">
+            <a:pPr marL="0" indent="0">
               <a:buNone/>
             </a:pPr>
             <a:r>
@@ -2168,7 +1874,7 @@
           <a:bodyPr wrap="square" rtlCol="0" anchor="ctr"/>
           <a:lstStyle/>
           <a:p>
-            <a:pPr indent="0" marL="0">
+            <a:pPr marL="0" indent="0">
               <a:buNone/>
             </a:pPr>
             <a:r>
@@ -2205,7 +1911,7 @@
           </a:solidFill>
           <a:ln/>
           <a:effectLst>
-            <a:outerShdw sx="100000" sy="100000" kx="0" ky="0" algn="bl" rotWithShape="0" blurRad="76200" dist="25400" dir="8100000">
+            <a:outerShdw blurRad="76200" dist="25400" dir="8100000" algn="bl" rotWithShape="0">
               <a:srgbClr val="000000">
                 <a:alpha val="12000"/>
               </a:srgbClr>
@@ -2254,7 +1960,7 @@
           <a:bodyPr wrap="square" rtlCol="0" anchor="ctr"/>
           <a:lstStyle/>
           <a:p>
-            <a:pPr indent="0" marL="0">
+            <a:pPr marL="0" indent="0">
               <a:buNone/>
             </a:pPr>
             <a:r>
@@ -2293,7 +1999,7 @@
           <a:bodyPr wrap="square" rtlCol="0" anchor="ctr"/>
           <a:lstStyle/>
           <a:p>
-            <a:pPr indent="0" marL="0">
+            <a:pPr marL="0" indent="0">
               <a:buNone/>
             </a:pPr>
             <a:r>
@@ -2310,7 +2016,7 @@
             <a:endParaRPr lang="en-US" sz="1200" dirty="0"/>
           </a:p>
           <a:p>
-            <a:pPr indent="0" marL="0">
+            <a:pPr marL="0" indent="0">
               <a:buNone/>
             </a:pPr>
             <a:r>
@@ -2369,7 +2075,7 @@
           <a:bodyPr wrap="square" rtlCol="0" anchor="ctr"/>
           <a:lstStyle/>
           <a:p>
-            <a:pPr indent="0" marL="0">
+            <a:pPr marL="0" indent="0">
               <a:buNone/>
             </a:pPr>
             <a:r>
@@ -2408,7 +2114,7 @@
           <a:bodyPr wrap="square" rtlCol="0" anchor="ctr"/>
           <a:lstStyle/>
           <a:p>
-            <a:pPr algn="ctr" indent="0" marL="0">
+            <a:pPr marL="0" indent="0" algn="ctr">
               <a:buNone/>
             </a:pPr>
             <a:r>
@@ -2442,6 +2148,7 @@
         <a:solidFill>
           <a:srgbClr val="F8FAFC"/>
         </a:solidFill>
+        <a:effectLst/>
       </p:bgPr>
     </p:bg>
     <p:spTree>
@@ -2479,7 +2186,7 @@
           <a:bodyPr wrap="square" rtlCol="0" anchor="ctr"/>
           <a:lstStyle/>
           <a:p>
-            <a:pPr indent="0" marL="0">
+            <a:pPr marL="0" indent="0">
               <a:buNone/>
             </a:pPr>
             <a:r>
@@ -2516,7 +2223,7 @@
           </a:solidFill>
           <a:ln/>
           <a:effectLst>
-            <a:outerShdw sx="100000" sy="100000" kx="0" ky="0" algn="bl" rotWithShape="0" blurRad="76200" dist="25400" dir="8100000">
+            <a:outerShdw blurRad="76200" dist="25400" dir="8100000" algn="bl" rotWithShape="0">
               <a:srgbClr val="000000">
                 <a:alpha val="12000"/>
               </a:srgbClr>
@@ -2565,7 +2272,7 @@
           <a:bodyPr wrap="square" rtlCol="0" anchor="ctr"/>
           <a:lstStyle/>
           <a:p>
-            <a:pPr algn="ctr" indent="0" marL="0">
+            <a:pPr marL="0" indent="0" algn="ctr">
               <a:buNone/>
             </a:pPr>
             <a:r>
@@ -2604,7 +2311,7 @@
           <a:bodyPr wrap="square" rtlCol="0" anchor="ctr"/>
           <a:lstStyle/>
           <a:p>
-            <a:pPr algn="ctr" indent="0" marL="0">
+            <a:pPr marL="0" indent="0" algn="ctr">
               <a:buNone/>
             </a:pPr>
             <a:r>
@@ -2643,7 +2350,7 @@
           <a:bodyPr wrap="square" rtlCol="0" anchor="ctr"/>
           <a:lstStyle/>
           <a:p>
-            <a:pPr algn="ctr" indent="0" marL="0">
+            <a:pPr marL="0" indent="0" algn="ctr">
               <a:buNone/>
             </a:pPr>
             <a:r>
@@ -2660,7 +2367,7 @@
             <a:endParaRPr lang="en-US" sz="1200" dirty="0"/>
           </a:p>
           <a:p>
-            <a:pPr algn="ctr" indent="0" marL="0">
+            <a:pPr marL="0" indent="0" algn="ctr">
               <a:buNone/>
             </a:pPr>
             <a:r>
@@ -2699,7 +2406,7 @@
           <a:bodyPr wrap="square" rtlCol="0" anchor="ctr"/>
           <a:lstStyle/>
           <a:p>
-            <a:pPr algn="ctr" indent="0" marL="0">
+            <a:pPr marL="0" indent="0" algn="ctr">
               <a:buNone/>
             </a:pPr>
             <a:r>
@@ -2733,7 +2440,7 @@
           </a:solidFill>
           <a:ln/>
           <a:effectLst>
-            <a:outerShdw sx="100000" sy="100000" kx="0" ky="0" algn="bl" rotWithShape="0" blurRad="76200" dist="25400" dir="8100000">
+            <a:outerShdw blurRad="76200" dist="25400" dir="8100000" algn="bl" rotWithShape="0">
               <a:srgbClr val="000000">
                 <a:alpha val="12000"/>
               </a:srgbClr>
@@ -2782,7 +2489,7 @@
           <a:bodyPr wrap="square" rtlCol="0" anchor="ctr"/>
           <a:lstStyle/>
           <a:p>
-            <a:pPr algn="ctr" indent="0" marL="0">
+            <a:pPr marL="0" indent="0" algn="ctr">
               <a:buNone/>
             </a:pPr>
             <a:r>
@@ -2821,7 +2528,7 @@
           <a:bodyPr wrap="square" rtlCol="0" anchor="ctr"/>
           <a:lstStyle/>
           <a:p>
-            <a:pPr algn="ctr" indent="0" marL="0">
+            <a:pPr marL="0" indent="0" algn="ctr">
               <a:buNone/>
             </a:pPr>
             <a:r>
@@ -2860,7 +2567,7 @@
           <a:bodyPr wrap="square" rtlCol="0" anchor="ctr"/>
           <a:lstStyle/>
           <a:p>
-            <a:pPr algn="ctr" indent="0" marL="0">
+            <a:pPr marL="0" indent="0" algn="ctr">
               <a:buNone/>
             </a:pPr>
             <a:r>
@@ -2877,7 +2584,7 @@
             <a:endParaRPr lang="en-US" sz="1200" dirty="0"/>
           </a:p>
           <a:p>
-            <a:pPr algn="ctr" indent="0" marL="0">
+            <a:pPr marL="0" indent="0" algn="ctr">
               <a:buNone/>
             </a:pPr>
             <a:r>
@@ -2916,7 +2623,7 @@
           <a:bodyPr wrap="square" rtlCol="0" anchor="ctr"/>
           <a:lstStyle/>
           <a:p>
-            <a:pPr algn="ctr" indent="0" marL="0">
+            <a:pPr marL="0" indent="0" algn="ctr">
               <a:buNone/>
             </a:pPr>
             <a:r>
@@ -2950,7 +2657,7 @@
           </a:solidFill>
           <a:ln/>
           <a:effectLst>
-            <a:outerShdw sx="100000" sy="100000" kx="0" ky="0" algn="bl" rotWithShape="0" blurRad="76200" dist="25400" dir="8100000">
+            <a:outerShdw blurRad="76200" dist="25400" dir="8100000" algn="bl" rotWithShape="0">
               <a:srgbClr val="000000">
                 <a:alpha val="12000"/>
               </a:srgbClr>
@@ -2999,7 +2706,7 @@
           <a:bodyPr wrap="square" rtlCol="0" anchor="ctr"/>
           <a:lstStyle/>
           <a:p>
-            <a:pPr algn="ctr" indent="0" marL="0">
+            <a:pPr marL="0" indent="0" algn="ctr">
               <a:buNone/>
             </a:pPr>
             <a:r>
@@ -3038,7 +2745,7 @@
           <a:bodyPr wrap="square" rtlCol="0" anchor="ctr"/>
           <a:lstStyle/>
           <a:p>
-            <a:pPr algn="ctr" indent="0" marL="0">
+            <a:pPr marL="0" indent="0" algn="ctr">
               <a:buNone/>
             </a:pPr>
             <a:r>
@@ -3077,7 +2784,7 @@
           <a:bodyPr wrap="square" rtlCol="0" anchor="ctr"/>
           <a:lstStyle/>
           <a:p>
-            <a:pPr algn="ctr" indent="0" marL="0">
+            <a:pPr marL="0" indent="0" algn="ctr">
               <a:buNone/>
             </a:pPr>
             <a:r>
@@ -3094,7 +2801,7 @@
             <a:endParaRPr lang="en-US" sz="1200" dirty="0"/>
           </a:p>
           <a:p>
-            <a:pPr algn="ctr" indent="0" marL="0">
+            <a:pPr marL="0" indent="0" algn="ctr">
               <a:buNone/>
             </a:pPr>
             <a:r>
@@ -3133,7 +2840,7 @@
           <a:bodyPr wrap="square" rtlCol="0" anchor="ctr"/>
           <a:lstStyle/>
           <a:p>
-            <a:pPr algn="ctr" indent="0" marL="0">
+            <a:pPr marL="0" indent="0" algn="ctr">
               <a:buNone/>
             </a:pPr>
             <a:r>
@@ -3167,7 +2874,7 @@
           </a:solidFill>
           <a:ln/>
           <a:effectLst>
-            <a:outerShdw sx="100000" sy="100000" kx="0" ky="0" algn="bl" rotWithShape="0" blurRad="76200" dist="25400" dir="8100000">
+            <a:outerShdw blurRad="76200" dist="25400" dir="8100000" algn="bl" rotWithShape="0">
               <a:srgbClr val="000000">
                 <a:alpha val="12000"/>
               </a:srgbClr>
@@ -3216,7 +2923,7 @@
           <a:bodyPr wrap="square" rtlCol="0" anchor="ctr"/>
           <a:lstStyle/>
           <a:p>
-            <a:pPr algn="ctr" indent="0" marL="0">
+            <a:pPr marL="0" indent="0" algn="ctr">
               <a:buNone/>
             </a:pPr>
             <a:r>
@@ -3255,7 +2962,7 @@
           <a:bodyPr wrap="square" rtlCol="0" anchor="ctr"/>
           <a:lstStyle/>
           <a:p>
-            <a:pPr algn="ctr" indent="0" marL="0">
+            <a:pPr marL="0" indent="0" algn="ctr">
               <a:buNone/>
             </a:pPr>
             <a:r>
@@ -3294,7 +3001,7 @@
           <a:bodyPr wrap="square" rtlCol="0" anchor="ctr"/>
           <a:lstStyle/>
           <a:p>
-            <a:pPr algn="ctr" indent="0" marL="0">
+            <a:pPr marL="0" indent="0" algn="ctr">
               <a:buNone/>
             </a:pPr>
             <a:r>
@@ -3311,7 +3018,7 @@
             <a:endParaRPr lang="en-US" sz="1200" dirty="0"/>
           </a:p>
           <a:p>
-            <a:pPr algn="ctr" indent="0" marL="0">
+            <a:pPr marL="0" indent="0" algn="ctr">
               <a:buNone/>
             </a:pPr>
             <a:r>
@@ -3350,7 +3057,7 @@
           <a:bodyPr wrap="square" rtlCol="0" anchor="ctr"/>
           <a:lstStyle/>
           <a:p>
-            <a:pPr algn="ctr" indent="0" marL="0">
+            <a:pPr marL="0" indent="0" algn="ctr">
               <a:buNone/>
             </a:pPr>
             <a:r>
@@ -3384,6 +3091,7 @@
         <a:solidFill>
           <a:srgbClr val="F8FAFC"/>
         </a:solidFill>
+        <a:effectLst/>
       </p:bgPr>
     </p:bg>
     <p:spTree>
@@ -3421,7 +3129,7 @@
           <a:bodyPr wrap="square" rtlCol="0" anchor="ctr"/>
           <a:lstStyle/>
           <a:p>
-            <a:pPr indent="0" marL="0">
+            <a:pPr marL="0" indent="0">
               <a:buNone/>
             </a:pPr>
             <a:r>
@@ -3462,8 +3170,20 @@
             <a:tbl>
               <a:tblPr/>
               <a:tblGrid>
-                <a:gridCol w="2926080"/>
-                <a:gridCol w="4754880"/>
+                <a:gridCol w="2926080">
+                  <a:extLst>
+                    <a:ext uri="{9D8B030D-6E8A-4147-A177-3AD203B41FA5}">
+                      <a16:colId xmlns:a16="http://schemas.microsoft.com/office/drawing/2014/main" val="20000"/>
+                    </a:ext>
+                  </a:extLst>
+                </a:gridCol>
+                <a:gridCol w="4754880">
+                  <a:extLst>
+                    <a:ext uri="{9D8B030D-6E8A-4147-A177-3AD203B41FA5}">
+                      <a16:colId xmlns:a16="http://schemas.microsoft.com/office/drawing/2014/main" val="20001"/>
+                    </a:ext>
+                  </a:extLst>
+                </a:gridCol>
               </a:tblGrid>
               <a:tr h="411480">
                 <a:tc>
@@ -3471,7 +3191,7 @@
                     <a:bodyPr/>
                     <a:lstStyle/>
                     <a:p>
-                      <a:pPr indent="0" marL="0">
+                      <a:pPr marL="0" indent="0">
                         <a:buNone/>
                       </a:pPr>
                       <a:r>
@@ -3492,7 +3212,7 @@
                       </a:endParaRPr>
                     </a:p>
                   </a:txBody>
-                  <a:tcPr marL="91440" marR="91440" marT="45720" marB="45720">
+                  <a:tcPr>
                     <a:lnL w="6350" cap="flat" cmpd="sng" algn="ctr">
                       <a:solidFill>
                         <a:srgbClr val="CBD5E1"/>
@@ -3539,7 +3259,7 @@
                     <a:bodyPr/>
                     <a:lstStyle/>
                     <a:p>
-                      <a:pPr indent="0" marL="0">
+                      <a:pPr marL="0" indent="0">
                         <a:buNone/>
                       </a:pPr>
                       <a:r>
@@ -3560,7 +3280,7 @@
                       </a:endParaRPr>
                     </a:p>
                   </a:txBody>
-                  <a:tcPr marL="91440" marR="91440" marT="45720" marB="45720">
+                  <a:tcPr>
                     <a:lnL w="6350" cap="flat" cmpd="sng" algn="ctr">
                       <a:solidFill>
                         <a:srgbClr val="CBD5E1"/>
@@ -3602,6 +3322,11 @@
                     </a:solidFill>
                   </a:tcPr>
                 </a:tc>
+                <a:extLst>
+                  <a:ext uri="{0D108BD9-81ED-4DB2-BD59-A6C34878D82A}">
+                    <a16:rowId xmlns:a16="http://schemas.microsoft.com/office/drawing/2014/main" val="10000"/>
+                  </a:ext>
+                </a:extLst>
               </a:tr>
               <a:tr h="384048">
                 <a:tc>
@@ -3609,7 +3334,7 @@
                     <a:bodyPr/>
                     <a:lstStyle/>
                     <a:p>
-                      <a:pPr indent="0" marL="0">
+                      <a:pPr marL="0" indent="0">
                         <a:buNone/>
                       </a:pPr>
                       <a:r>
@@ -3630,7 +3355,7 @@
                       </a:endParaRPr>
                     </a:p>
                   </a:txBody>
-                  <a:tcPr marL="91440" marR="91440" marT="45720" marB="45720">
+                  <a:tcPr>
                     <a:lnL w="6350" cap="flat" cmpd="sng" algn="ctr">
                       <a:solidFill>
                         <a:srgbClr val="CBD5E1"/>
@@ -3674,7 +3399,7 @@
                     <a:bodyPr/>
                     <a:lstStyle/>
                     <a:p>
-                      <a:pPr indent="0" marL="0">
+                      <a:pPr marL="0" indent="0">
                         <a:buNone/>
                       </a:pPr>
                       <a:r>
@@ -3688,7 +3413,7 @@
                       <a:endParaRPr lang="en-US" sz="1200" dirty="0"/>
                     </a:p>
                   </a:txBody>
-                  <a:tcPr marL="91440" marR="91440" marT="45720" marB="45720">
+                  <a:tcPr>
                     <a:lnL w="6350" cap="flat" cmpd="sng" algn="ctr">
                       <a:solidFill>
                         <a:srgbClr val="CBD5E1"/>
@@ -3727,6 +3452,11 @@
                     </a:lnB>
                   </a:tcPr>
                 </a:tc>
+                <a:extLst>
+                  <a:ext uri="{0D108BD9-81ED-4DB2-BD59-A6C34878D82A}">
+                    <a16:rowId xmlns:a16="http://schemas.microsoft.com/office/drawing/2014/main" val="10001"/>
+                  </a:ext>
+                </a:extLst>
               </a:tr>
               <a:tr h="384048">
                 <a:tc>
@@ -3734,7 +3464,7 @@
                     <a:bodyPr/>
                     <a:lstStyle/>
                     <a:p>
-                      <a:pPr indent="0" marL="0">
+                      <a:pPr marL="0" indent="0">
                         <a:buNone/>
                       </a:pPr>
                       <a:r>
@@ -3755,7 +3485,7 @@
                       </a:endParaRPr>
                     </a:p>
                   </a:txBody>
-                  <a:tcPr marL="91440" marR="91440" marT="45720" marB="45720">
+                  <a:tcPr>
                     <a:lnL w="6350" cap="flat" cmpd="sng" algn="ctr">
                       <a:solidFill>
                         <a:srgbClr val="CBD5E1"/>
@@ -3799,7 +3529,7 @@
                     <a:bodyPr/>
                     <a:lstStyle/>
                     <a:p>
-                      <a:pPr indent="0" marL="0">
+                      <a:pPr marL="0" indent="0">
                         <a:buNone/>
                       </a:pPr>
                       <a:r>
@@ -3813,7 +3543,7 @@
                       <a:endParaRPr lang="en-US" sz="1200" dirty="0"/>
                     </a:p>
                   </a:txBody>
-                  <a:tcPr marL="91440" marR="91440" marT="45720" marB="45720">
+                  <a:tcPr>
                     <a:lnL w="6350" cap="flat" cmpd="sng" algn="ctr">
                       <a:solidFill>
                         <a:srgbClr val="CBD5E1"/>
@@ -3852,6 +3582,11 @@
                     </a:lnB>
                   </a:tcPr>
                 </a:tc>
+                <a:extLst>
+                  <a:ext uri="{0D108BD9-81ED-4DB2-BD59-A6C34878D82A}">
+                    <a16:rowId xmlns:a16="http://schemas.microsoft.com/office/drawing/2014/main" val="10002"/>
+                  </a:ext>
+                </a:extLst>
               </a:tr>
               <a:tr h="384048">
                 <a:tc>
@@ -3859,7 +3594,7 @@
                     <a:bodyPr/>
                     <a:lstStyle/>
                     <a:p>
-                      <a:pPr indent="0" marL="0">
+                      <a:pPr marL="0" indent="0">
                         <a:buNone/>
                       </a:pPr>
                       <a:r>
@@ -3880,7 +3615,7 @@
                       </a:endParaRPr>
                     </a:p>
                   </a:txBody>
-                  <a:tcPr marL="91440" marR="91440" marT="45720" marB="45720">
+                  <a:tcPr>
                     <a:lnL w="6350" cap="flat" cmpd="sng" algn="ctr">
                       <a:solidFill>
                         <a:srgbClr val="CBD5E1"/>
@@ -3924,7 +3659,7 @@
                     <a:bodyPr/>
                     <a:lstStyle/>
                     <a:p>
-                      <a:pPr indent="0" marL="0">
+                      <a:pPr marL="0" indent="0">
                         <a:buNone/>
                       </a:pPr>
                       <a:r>
@@ -3938,7 +3673,7 @@
                       <a:endParaRPr lang="en-US" sz="1200" dirty="0"/>
                     </a:p>
                   </a:txBody>
-                  <a:tcPr marL="91440" marR="91440" marT="45720" marB="45720">
+                  <a:tcPr>
                     <a:lnL w="6350" cap="flat" cmpd="sng" algn="ctr">
                       <a:solidFill>
                         <a:srgbClr val="CBD5E1"/>
@@ -3977,6 +3712,11 @@
                     </a:lnB>
                   </a:tcPr>
                 </a:tc>
+                <a:extLst>
+                  <a:ext uri="{0D108BD9-81ED-4DB2-BD59-A6C34878D82A}">
+                    <a16:rowId xmlns:a16="http://schemas.microsoft.com/office/drawing/2014/main" val="10003"/>
+                  </a:ext>
+                </a:extLst>
               </a:tr>
               <a:tr h="384048">
                 <a:tc>
@@ -3984,7 +3724,7 @@
                     <a:bodyPr/>
                     <a:lstStyle/>
                     <a:p>
-                      <a:pPr indent="0" marL="0">
+                      <a:pPr marL="0" indent="0">
                         <a:buNone/>
                       </a:pPr>
                       <a:r>
@@ -4005,7 +3745,7 @@
                       </a:endParaRPr>
                     </a:p>
                   </a:txBody>
-                  <a:tcPr marL="91440" marR="91440" marT="45720" marB="45720">
+                  <a:tcPr>
                     <a:lnL w="6350" cap="flat" cmpd="sng" algn="ctr">
                       <a:solidFill>
                         <a:srgbClr val="CBD5E1"/>
@@ -4049,7 +3789,7 @@
                     <a:bodyPr/>
                     <a:lstStyle/>
                     <a:p>
-                      <a:pPr indent="0" marL="0">
+                      <a:pPr marL="0" indent="0">
                         <a:buNone/>
                       </a:pPr>
                       <a:r>
@@ -4063,7 +3803,7 @@
                       <a:endParaRPr lang="en-US" sz="1200" dirty="0"/>
                     </a:p>
                   </a:txBody>
-                  <a:tcPr marL="91440" marR="91440" marT="45720" marB="45720">
+                  <a:tcPr>
                     <a:lnL w="6350" cap="flat" cmpd="sng" algn="ctr">
                       <a:solidFill>
                         <a:srgbClr val="CBD5E1"/>
@@ -4102,6 +3842,11 @@
                     </a:lnB>
                   </a:tcPr>
                 </a:tc>
+                <a:extLst>
+                  <a:ext uri="{0D108BD9-81ED-4DB2-BD59-A6C34878D82A}">
+                    <a16:rowId xmlns:a16="http://schemas.microsoft.com/office/drawing/2014/main" val="10004"/>
+                  </a:ext>
+                </a:extLst>
               </a:tr>
               <a:tr h="384048">
                 <a:tc>
@@ -4109,7 +3854,7 @@
                     <a:bodyPr/>
                     <a:lstStyle/>
                     <a:p>
-                      <a:pPr indent="0" marL="0">
+                      <a:pPr marL="0" indent="0">
                         <a:buNone/>
                       </a:pPr>
                       <a:r>
@@ -4130,7 +3875,7 @@
                       </a:endParaRPr>
                     </a:p>
                   </a:txBody>
-                  <a:tcPr marL="91440" marR="91440" marT="45720" marB="45720">
+                  <a:tcPr>
                     <a:lnL w="6350" cap="flat" cmpd="sng" algn="ctr">
                       <a:solidFill>
                         <a:srgbClr val="CBD5E1"/>
@@ -4174,7 +3919,7 @@
                     <a:bodyPr/>
                     <a:lstStyle/>
                     <a:p>
-                      <a:pPr indent="0" marL="0">
+                      <a:pPr marL="0" indent="0">
                         <a:buNone/>
                       </a:pPr>
                       <a:r>
@@ -4188,7 +3933,7 @@
                       <a:endParaRPr lang="en-US" sz="1200" dirty="0"/>
                     </a:p>
                   </a:txBody>
-                  <a:tcPr marL="91440" marR="91440" marT="45720" marB="45720">
+                  <a:tcPr>
                     <a:lnL w="6350" cap="flat" cmpd="sng" algn="ctr">
                       <a:solidFill>
                         <a:srgbClr val="CBD5E1"/>
@@ -4227,6 +3972,11 @@
                     </a:lnB>
                   </a:tcPr>
                 </a:tc>
+                <a:extLst>
+                  <a:ext uri="{0D108BD9-81ED-4DB2-BD59-A6C34878D82A}">
+                    <a16:rowId xmlns:a16="http://schemas.microsoft.com/office/drawing/2014/main" val="10005"/>
+                  </a:ext>
+                </a:extLst>
               </a:tr>
               <a:tr h="384048">
                 <a:tc>
@@ -4234,7 +3984,7 @@
                     <a:bodyPr/>
                     <a:lstStyle/>
                     <a:p>
-                      <a:pPr indent="0" marL="0">
+                      <a:pPr marL="0" indent="0">
                         <a:buNone/>
                       </a:pPr>
                       <a:r>
@@ -4255,7 +4005,7 @@
                       </a:endParaRPr>
                     </a:p>
                   </a:txBody>
-                  <a:tcPr marL="91440" marR="91440" marT="45720" marB="45720">
+                  <a:tcPr>
                     <a:lnL w="6350" cap="flat" cmpd="sng" algn="ctr">
                       <a:solidFill>
                         <a:srgbClr val="CBD5E1"/>
@@ -4299,7 +4049,7 @@
                     <a:bodyPr/>
                     <a:lstStyle/>
                     <a:p>
-                      <a:pPr indent="0" marL="0">
+                      <a:pPr marL="0" indent="0">
                         <a:buNone/>
                       </a:pPr>
                       <a:r>
@@ -4313,7 +4063,7 @@
                       <a:endParaRPr lang="en-US" sz="1200" dirty="0"/>
                     </a:p>
                   </a:txBody>
-                  <a:tcPr marL="91440" marR="91440" marT="45720" marB="45720">
+                  <a:tcPr>
                     <a:lnL w="6350" cap="flat" cmpd="sng" algn="ctr">
                       <a:solidFill>
                         <a:srgbClr val="CBD5E1"/>
@@ -4352,6 +4102,11 @@
                     </a:lnB>
                   </a:tcPr>
                 </a:tc>
+                <a:extLst>
+                  <a:ext uri="{0D108BD9-81ED-4DB2-BD59-A6C34878D82A}">
+                    <a16:rowId xmlns:a16="http://schemas.microsoft.com/office/drawing/2014/main" val="10006"/>
+                  </a:ext>
+                </a:extLst>
               </a:tr>
             </a:tbl>
           </a:graphicData>
@@ -4376,7 +4131,7 @@
           </a:solidFill>
           <a:ln/>
           <a:effectLst>
-            <a:outerShdw sx="100000" sy="100000" kx="0" ky="0" algn="bl" rotWithShape="0" blurRad="76200" dist="25400" dir="8100000">
+            <a:outerShdw blurRad="76200" dist="25400" dir="8100000" algn="bl" rotWithShape="0">
               <a:srgbClr val="000000">
                 <a:alpha val="12000"/>
               </a:srgbClr>
@@ -4386,7 +4141,7 @@
       </p:sp>
       <p:sp>
         <p:nvSpPr>
-          <p:cNvPr id="5" name="Text 2"/>
+          <p:cNvPr id="3" name="Text 2"/>
           <p:cNvSpPr/>
           <p:nvPr/>
         </p:nvSpPr>
@@ -4405,7 +4160,7 @@
           <a:bodyPr wrap="square" rtlCol="0" anchor="ctr"/>
           <a:lstStyle/>
           <a:p>
-            <a:pPr indent="0" marL="0">
+            <a:pPr marL="0" indent="0">
               <a:buNone/>
             </a:pPr>
             <a:r>
@@ -4419,9 +4174,6 @@
               </a:rPr>
               <a:t>Lattice: </a:t>
             </a:r>
-            <a:pPr indent="0" marL="0">
-              <a:buNone/>
-            </a:pPr>
             <a:r>
               <a:rPr lang="en-US" sz="1300" dirty="0">
                 <a:solidFill>
@@ -4453,6 +4205,7 @@
         <a:solidFill>
           <a:srgbClr val="F8FAFC"/>
         </a:solidFill>
+        <a:effectLst/>
       </p:bgPr>
     </p:bg>
     <p:spTree>
@@ -4490,7 +4243,7 @@
           <a:bodyPr wrap="square" rtlCol="0" anchor="ctr"/>
           <a:lstStyle/>
           <a:p>
-            <a:pPr indent="0" marL="0">
+            <a:pPr marL="0" indent="0">
               <a:buNone/>
             </a:pPr>
             <a:r>
@@ -4527,7 +4280,7 @@
           </a:solidFill>
           <a:ln/>
           <a:effectLst>
-            <a:outerShdw sx="100000" sy="100000" kx="0" ky="0" algn="bl" rotWithShape="0" blurRad="76200" dist="25400" dir="8100000">
+            <a:outerShdw blurRad="76200" dist="25400" dir="8100000" algn="bl" rotWithShape="0">
               <a:srgbClr val="000000">
                 <a:alpha val="12000"/>
               </a:srgbClr>
@@ -4576,7 +4329,7 @@
           <a:bodyPr wrap="square" rtlCol="0" anchor="ctr"/>
           <a:lstStyle/>
           <a:p>
-            <a:pPr indent="0" marL="0">
+            <a:pPr marL="0" indent="0">
               <a:buNone/>
             </a:pPr>
             <a:r>
@@ -4635,7 +4388,7 @@
           <a:bodyPr wrap="square" rtlCol="0" anchor="ctr"/>
           <a:lstStyle/>
           <a:p>
-            <a:pPr indent="0" marL="0">
+            <a:pPr marL="0" indent="0">
               <a:buNone/>
             </a:pPr>
             <a:r>
@@ -4652,7 +4405,7 @@
             <a:endParaRPr lang="en-US" sz="1100" dirty="0"/>
           </a:p>
           <a:p>
-            <a:pPr indent="0" marL="0">
+            <a:pPr marL="0" indent="0">
               <a:buNone/>
             </a:pPr>
             <a:r>
@@ -4669,7 +4422,7 @@
             <a:endParaRPr lang="en-US" sz="1100" dirty="0"/>
           </a:p>
           <a:p>
-            <a:pPr indent="0" marL="0">
+            <a:pPr marL="0" indent="0">
               <a:buNone/>
             </a:pPr>
             <a:r>
@@ -4708,7 +4461,7 @@
           <a:bodyPr wrap="square" rtlCol="0" anchor="ctr"/>
           <a:lstStyle/>
           <a:p>
-            <a:pPr indent="0" marL="0">
+            <a:pPr marL="0" indent="0">
               <a:buNone/>
             </a:pPr>
             <a:r>
@@ -4745,7 +4498,7 @@
           </a:solidFill>
           <a:ln/>
           <a:effectLst>
-            <a:outerShdw sx="100000" sy="100000" kx="0" ky="0" algn="bl" rotWithShape="0" blurRad="76200" dist="25400" dir="8100000">
+            <a:outerShdw blurRad="76200" dist="25400" dir="8100000" algn="bl" rotWithShape="0">
               <a:srgbClr val="000000">
                 <a:alpha val="12000"/>
               </a:srgbClr>
@@ -4794,7 +4547,7 @@
           <a:bodyPr wrap="square" rtlCol="0" anchor="ctr"/>
           <a:lstStyle/>
           <a:p>
-            <a:pPr indent="0" marL="0">
+            <a:pPr marL="0" indent="0">
               <a:buNone/>
             </a:pPr>
             <a:r>
@@ -4853,7 +4606,7 @@
           <a:bodyPr wrap="square" rtlCol="0" anchor="ctr"/>
           <a:lstStyle/>
           <a:p>
-            <a:pPr indent="0" marL="0">
+            <a:pPr marL="0" indent="0">
               <a:buNone/>
             </a:pPr>
             <a:r>
@@ -4870,7 +4623,7 @@
             <a:endParaRPr lang="en-US" sz="1100" dirty="0"/>
           </a:p>
           <a:p>
-            <a:pPr indent="0" marL="0">
+            <a:pPr marL="0" indent="0">
               <a:buNone/>
             </a:pPr>
             <a:r>
@@ -4887,7 +4640,7 @@
             <a:endParaRPr lang="en-US" sz="1100" dirty="0"/>
           </a:p>
           <a:p>
-            <a:pPr indent="0" marL="0">
+            <a:pPr marL="0" indent="0">
               <a:buNone/>
             </a:pPr>
             <a:r>
@@ -4926,7 +4679,7 @@
           <a:bodyPr wrap="square" rtlCol="0" anchor="ctr"/>
           <a:lstStyle/>
           <a:p>
-            <a:pPr indent="0" marL="0">
+            <a:pPr marL="0" indent="0">
               <a:buNone/>
             </a:pPr>
             <a:r>
@@ -4963,7 +4716,7 @@
           </a:solidFill>
           <a:ln/>
           <a:effectLst>
-            <a:outerShdw sx="100000" sy="100000" kx="0" ky="0" algn="bl" rotWithShape="0" blurRad="76200" dist="25400" dir="8100000">
+            <a:outerShdw blurRad="76200" dist="25400" dir="8100000" algn="bl" rotWithShape="0">
               <a:srgbClr val="000000">
                 <a:alpha val="12000"/>
               </a:srgbClr>
@@ -5012,7 +4765,7 @@
           <a:bodyPr wrap="square" rtlCol="0" anchor="ctr"/>
           <a:lstStyle/>
           <a:p>
-            <a:pPr indent="0" marL="0">
+            <a:pPr marL="0" indent="0">
               <a:buNone/>
             </a:pPr>
             <a:r>
@@ -5071,7 +4824,7 @@
           <a:bodyPr wrap="square" rtlCol="0" anchor="ctr"/>
           <a:lstStyle/>
           <a:p>
-            <a:pPr indent="0" marL="0">
+            <a:pPr marL="0" indent="0">
               <a:buNone/>
             </a:pPr>
             <a:r>
@@ -5088,7 +4841,7 @@
             <a:endParaRPr lang="en-US" sz="1100" dirty="0"/>
           </a:p>
           <a:p>
-            <a:pPr indent="0" marL="0">
+            <a:pPr marL="0" indent="0">
               <a:buNone/>
             </a:pPr>
             <a:r>
@@ -5105,7 +4858,7 @@
             <a:endParaRPr lang="en-US" sz="1100" dirty="0"/>
           </a:p>
           <a:p>
-            <a:pPr indent="0" marL="0">
+            <a:pPr marL="0" indent="0">
               <a:buNone/>
             </a:pPr>
             <a:r>
@@ -5144,7 +4897,7 @@
           <a:bodyPr wrap="square" rtlCol="0" anchor="ctr"/>
           <a:lstStyle/>
           <a:p>
-            <a:pPr indent="0" marL="0">
+            <a:pPr marL="0" indent="0">
               <a:buNone/>
             </a:pPr>
             <a:r>
@@ -5181,7 +4934,7 @@
           </a:solidFill>
           <a:ln/>
           <a:effectLst>
-            <a:outerShdw sx="100000" sy="100000" kx="0" ky="0" algn="bl" rotWithShape="0" blurRad="76200" dist="25400" dir="8100000">
+            <a:outerShdw blurRad="76200" dist="25400" dir="8100000" algn="bl" rotWithShape="0">
               <a:srgbClr val="000000">
                 <a:alpha val="12000"/>
               </a:srgbClr>
@@ -5230,7 +4983,7 @@
           <a:bodyPr wrap="square" rtlCol="0" anchor="ctr"/>
           <a:lstStyle/>
           <a:p>
-            <a:pPr indent="0" marL="0">
+            <a:pPr marL="0" indent="0">
               <a:buNone/>
             </a:pPr>
             <a:r>
@@ -5289,7 +5042,7 @@
           <a:bodyPr wrap="square" rtlCol="0" anchor="ctr"/>
           <a:lstStyle/>
           <a:p>
-            <a:pPr indent="0" marL="0">
+            <a:pPr marL="0" indent="0">
               <a:buNone/>
             </a:pPr>
             <a:r>
@@ -5306,7 +5059,7 @@
             <a:endParaRPr lang="en-US" sz="1100" dirty="0"/>
           </a:p>
           <a:p>
-            <a:pPr indent="0" marL="0">
+            <a:pPr marL="0" indent="0">
               <a:buNone/>
             </a:pPr>
             <a:r>
@@ -5323,7 +5076,7 @@
             <a:endParaRPr lang="en-US" sz="1100" dirty="0"/>
           </a:p>
           <a:p>
-            <a:pPr indent="0" marL="0">
+            <a:pPr marL="0" indent="0">
               <a:buNone/>
             </a:pPr>
             <a:r>
@@ -5362,7 +5115,7 @@
           <a:bodyPr wrap="square" rtlCol="0" anchor="ctr"/>
           <a:lstStyle/>
           <a:p>
-            <a:pPr indent="0" marL="0">
+            <a:pPr marL="0" indent="0">
               <a:buNone/>
             </a:pPr>
             <a:r>
@@ -5396,6 +5149,7 @@
         <a:solidFill>
           <a:srgbClr val="F8FAFC"/>
         </a:solidFill>
+        <a:effectLst/>
       </p:bgPr>
     </p:bg>
     <p:spTree>
@@ -5433,7 +5187,7 @@
           <a:bodyPr wrap="square" rtlCol="0" anchor="ctr"/>
           <a:lstStyle/>
           <a:p>
-            <a:pPr indent="0" marL="0">
+            <a:pPr marL="0" indent="0">
               <a:buNone/>
             </a:pPr>
             <a:r>
@@ -5470,7 +5224,7 @@
           </a:solidFill>
           <a:ln/>
           <a:effectLst>
-            <a:outerShdw sx="100000" sy="100000" kx="0" ky="0" algn="bl" rotWithShape="0" blurRad="76200" dist="25400" dir="8100000">
+            <a:outerShdw blurRad="76200" dist="25400" dir="8100000" algn="bl" rotWithShape="0">
               <a:srgbClr val="000000">
                 <a:alpha val="12000"/>
               </a:srgbClr>
@@ -5519,7 +5273,7 @@
           <a:bodyPr wrap="square" rtlCol="0" anchor="ctr"/>
           <a:lstStyle/>
           <a:p>
-            <a:pPr indent="0" marL="0">
+            <a:pPr marL="0" indent="0">
               <a:buNone/>
             </a:pPr>
             <a:r>
@@ -5578,7 +5332,7 @@
           <a:bodyPr wrap="square" rtlCol="0" anchor="ctr"/>
           <a:lstStyle/>
           <a:p>
-            <a:pPr indent="0" marL="0">
+            <a:pPr marL="0" indent="0">
               <a:buNone/>
             </a:pPr>
             <a:r>
@@ -5595,7 +5349,7 @@
             <a:endParaRPr lang="en-US" sz="1100" dirty="0"/>
           </a:p>
           <a:p>
-            <a:pPr indent="0" marL="0">
+            <a:pPr marL="0" indent="0">
               <a:buNone/>
             </a:pPr>
             <a:r>
@@ -5612,7 +5366,7 @@
             <a:endParaRPr lang="en-US" sz="1100" dirty="0"/>
           </a:p>
           <a:p>
-            <a:pPr indent="0" marL="0">
+            <a:pPr marL="0" indent="0">
               <a:buNone/>
             </a:pPr>
             <a:r>
@@ -5651,7 +5405,7 @@
           <a:bodyPr wrap="square" rtlCol="0" anchor="ctr"/>
           <a:lstStyle/>
           <a:p>
-            <a:pPr indent="0" marL="0">
+            <a:pPr marL="0" indent="0">
               <a:buNone/>
             </a:pPr>
             <a:r>
@@ -5690,7 +5444,7 @@
           <a:bodyPr wrap="square" rtlCol="0" anchor="ctr"/>
           <a:lstStyle/>
           <a:p>
-            <a:pPr indent="0" marL="0">
+            <a:pPr marL="0" indent="0">
               <a:buNone/>
             </a:pPr>
             <a:r>
@@ -5707,7 +5461,7 @@
             <a:endParaRPr lang="en-US" sz="1200" dirty="0"/>
           </a:p>
           <a:p>
-            <a:pPr indent="0" marL="0">
+            <a:pPr marL="0" indent="0">
               <a:buNone/>
             </a:pPr>
             <a:r>
@@ -5744,7 +5498,7 @@
           </a:solidFill>
           <a:ln/>
           <a:effectLst>
-            <a:outerShdw sx="100000" sy="100000" kx="0" ky="0" algn="bl" rotWithShape="0" blurRad="76200" dist="25400" dir="8100000">
+            <a:outerShdw blurRad="76200" dist="25400" dir="8100000" algn="bl" rotWithShape="0">
               <a:srgbClr val="000000">
                 <a:alpha val="12000"/>
               </a:srgbClr>
@@ -5793,7 +5547,7 @@
           <a:bodyPr wrap="square" rtlCol="0" anchor="ctr"/>
           <a:lstStyle/>
           <a:p>
-            <a:pPr indent="0" marL="0">
+            <a:pPr marL="0" indent="0">
               <a:buNone/>
             </a:pPr>
             <a:r>
@@ -5852,7 +5606,7 @@
           <a:bodyPr wrap="square" rtlCol="0" anchor="ctr"/>
           <a:lstStyle/>
           <a:p>
-            <a:pPr indent="0" marL="0">
+            <a:pPr marL="0" indent="0">
               <a:buNone/>
             </a:pPr>
             <a:r>
@@ -5869,7 +5623,7 @@
             <a:endParaRPr lang="en-US" sz="1100" dirty="0"/>
           </a:p>
           <a:p>
-            <a:pPr indent="0" marL="0">
+            <a:pPr marL="0" indent="0">
               <a:buNone/>
             </a:pPr>
             <a:r>
@@ -5886,7 +5640,7 @@
             <a:endParaRPr lang="en-US" sz="1100" dirty="0"/>
           </a:p>
           <a:p>
-            <a:pPr indent="0" marL="0">
+            <a:pPr marL="0" indent="0">
               <a:buNone/>
             </a:pPr>
             <a:r>
@@ -5903,7 +5657,7 @@
             <a:endParaRPr lang="en-US" sz="1100" dirty="0"/>
           </a:p>
           <a:p>
-            <a:pPr indent="0" marL="0">
+            <a:pPr marL="0" indent="0">
               <a:buNone/>
             </a:pPr>
             <a:r>
@@ -5942,7 +5696,7 @@
           <a:bodyPr wrap="square" rtlCol="0" anchor="ctr"/>
           <a:lstStyle/>
           <a:p>
-            <a:pPr indent="0" marL="0">
+            <a:pPr marL="0" indent="0">
               <a:buNone/>
             </a:pPr>
             <a:r>
@@ -5981,7 +5735,7 @@
           <a:bodyPr wrap="square" rtlCol="0" anchor="ctr"/>
           <a:lstStyle/>
           <a:p>
-            <a:pPr indent="0" marL="0">
+            <a:pPr marL="0" indent="0">
               <a:buNone/>
             </a:pPr>
             <a:r>
@@ -5998,7 +5752,7 @@
             <a:endParaRPr lang="en-US" sz="1200" dirty="0"/>
           </a:p>
           <a:p>
-            <a:pPr indent="0" marL="0">
+            <a:pPr marL="0" indent="0">
               <a:buNone/>
             </a:pPr>
             <a:r>
@@ -6035,7 +5789,7 @@
           </a:solidFill>
           <a:ln/>
           <a:effectLst>
-            <a:outerShdw sx="100000" sy="100000" kx="0" ky="0" algn="bl" rotWithShape="0" blurRad="76200" dist="25400" dir="8100000">
+            <a:outerShdw blurRad="76200" dist="25400" dir="8100000" algn="bl" rotWithShape="0">
               <a:srgbClr val="000000">
                 <a:alpha val="12000"/>
               </a:srgbClr>
@@ -6064,7 +5818,7 @@
           <a:bodyPr wrap="square" rtlCol="0" anchor="ctr"/>
           <a:lstStyle/>
           <a:p>
-            <a:pPr algn="ctr" indent="0" marL="0">
+            <a:pPr marL="0" indent="0" algn="ctr">
               <a:buNone/>
             </a:pPr>
             <a:r>
@@ -6078,9 +5832,6 @@
               </a:rPr>
               <a:t>6 tests total:  </a:t>
             </a:r>
-            <a:pPr algn="ctr" indent="0" marL="0">
-              <a:buNone/>
-            </a:pPr>
             <a:r>
               <a:rPr lang="en-US" sz="1400" b="1" dirty="0">
                 <a:solidFill>
@@ -6092,9 +5843,6 @@
               </a:rPr>
               <a:t>4 vulnerabilities caught</a:t>
             </a:r>
-            <a:pPr algn="ctr" indent="0" marL="0">
-              <a:buNone/>
-            </a:pPr>
             <a:r>
               <a:rPr lang="en-US" sz="1400" dirty="0">
                 <a:solidFill>
@@ -6103,9 +5851,6 @@
               </a:rPr>
               <a:t>  |  </a:t>
             </a:r>
-            <a:pPr algn="ctr" indent="0" marL="0">
-              <a:buNone/>
-            </a:pPr>
             <a:r>
               <a:rPr lang="en-US" sz="1400" b="1" dirty="0">
                 <a:solidFill>
@@ -6137,6 +5882,7 @@
         <a:solidFill>
           <a:srgbClr val="F8FAFC"/>
         </a:solidFill>
+        <a:effectLst/>
       </p:bgPr>
     </p:bg>
     <p:spTree>
@@ -6174,7 +5920,7 @@
           <a:bodyPr wrap="square" rtlCol="0" anchor="ctr"/>
           <a:lstStyle/>
           <a:p>
-            <a:pPr indent="0" marL="0">
+            <a:pPr marL="0" indent="0">
               <a:buNone/>
             </a:pPr>
             <a:r>
@@ -6211,7 +5957,7 @@
           </a:solidFill>
           <a:ln/>
           <a:effectLst>
-            <a:outerShdw sx="100000" sy="100000" kx="0" ky="0" algn="bl" rotWithShape="0" blurRad="76200" dist="25400" dir="8100000">
+            <a:outerShdw blurRad="76200" dist="25400" dir="8100000" algn="bl" rotWithShape="0">
               <a:srgbClr val="000000">
                 <a:alpha val="12000"/>
               </a:srgbClr>
@@ -6260,7 +6006,7 @@
           <a:bodyPr wrap="square" rtlCol="0" anchor="ctr"/>
           <a:lstStyle/>
           <a:p>
-            <a:pPr indent="0" marL="0">
+            <a:pPr marL="0" indent="0">
               <a:buNone/>
             </a:pPr>
             <a:r>
@@ -6299,7 +6045,7 @@
           <a:bodyPr wrap="square" rtlCol="0" anchor="ctr"/>
           <a:lstStyle/>
           <a:p>
-            <a:pPr indent="0" marL="0">
+            <a:pPr marL="0" indent="0">
               <a:buNone/>
             </a:pPr>
             <a:r>
@@ -6317,7 +6063,7 @@
             <a:endParaRPr lang="en-US" sz="1200" dirty="0"/>
           </a:p>
           <a:p>
-            <a:pPr indent="0" marL="0">
+            <a:pPr marL="0" indent="0">
               <a:buNone/>
             </a:pPr>
             <a:r>
@@ -6335,7 +6081,7 @@
             <a:endParaRPr lang="en-US" sz="1200" dirty="0"/>
           </a:p>
           <a:p>
-            <a:pPr indent="0" marL="0">
+            <a:pPr marL="0" indent="0">
               <a:buNone/>
             </a:pPr>
             <a:r>
@@ -6353,7 +6099,7 @@
             <a:endParaRPr lang="en-US" sz="1200" dirty="0"/>
           </a:p>
           <a:p>
-            <a:pPr indent="0" marL="0">
+            <a:pPr marL="0" indent="0">
               <a:buNone/>
             </a:pPr>
             <a:r>
@@ -6390,7 +6136,7 @@
           </a:solidFill>
           <a:ln/>
           <a:effectLst>
-            <a:outerShdw sx="100000" sy="100000" kx="0" ky="0" algn="bl" rotWithShape="0" blurRad="76200" dist="25400" dir="8100000">
+            <a:outerShdw blurRad="76200" dist="25400" dir="8100000" algn="bl" rotWithShape="0">
               <a:srgbClr val="000000">
                 <a:alpha val="12000"/>
               </a:srgbClr>
@@ -6439,7 +6185,7 @@
           <a:bodyPr wrap="square" rtlCol="0" anchor="ctr"/>
           <a:lstStyle/>
           <a:p>
-            <a:pPr indent="0" marL="0">
+            <a:pPr marL="0" indent="0">
               <a:buNone/>
             </a:pPr>
             <a:r>
@@ -6478,7 +6224,7 @@
           <a:bodyPr wrap="square" rtlCol="0" anchor="ctr"/>
           <a:lstStyle/>
           <a:p>
-            <a:pPr indent="0" marL="0">
+            <a:pPr marL="0" indent="0">
               <a:buNone/>
             </a:pPr>
             <a:r>
@@ -6496,7 +6242,7 @@
             <a:endParaRPr lang="en-US" sz="1200" dirty="0"/>
           </a:p>
           <a:p>
-            <a:pPr indent="0" marL="0">
+            <a:pPr marL="0" indent="0">
               <a:buNone/>
             </a:pPr>
             <a:r>
@@ -6514,7 +6260,7 @@
             <a:endParaRPr lang="en-US" sz="1200" dirty="0"/>
           </a:p>
           <a:p>
-            <a:pPr indent="0" marL="0">
+            <a:pPr marL="0" indent="0">
               <a:buNone/>
             </a:pPr>
             <a:r>
@@ -6532,7 +6278,7 @@
             <a:endParaRPr lang="en-US" sz="1200" dirty="0"/>
           </a:p>
           <a:p>
-            <a:pPr indent="0" marL="0">
+            <a:pPr marL="0" indent="0">
               <a:buNone/>
             </a:pPr>
             <a:r>
@@ -6569,7 +6315,7 @@
           </a:solidFill>
           <a:ln/>
           <a:effectLst>
-            <a:outerShdw sx="100000" sy="100000" kx="0" ky="0" algn="bl" rotWithShape="0" blurRad="76200" dist="25400" dir="8100000">
+            <a:outerShdw blurRad="76200" dist="25400" dir="8100000" algn="bl" rotWithShape="0">
               <a:srgbClr val="000000">
                 <a:alpha val="12000"/>
               </a:srgbClr>
@@ -6618,7 +6364,7 @@
           <a:bodyPr wrap="square" rtlCol="0" anchor="ctr"/>
           <a:lstStyle/>
           <a:p>
-            <a:pPr indent="0" marL="0">
+            <a:pPr marL="0" indent="0">
               <a:buNone/>
             </a:pPr>
             <a:r>
@@ -6657,7 +6403,7 @@
           <a:bodyPr wrap="square" rtlCol="0" anchor="ctr"/>
           <a:lstStyle/>
           <a:p>
-            <a:pPr indent="0" marL="0">
+            <a:pPr marL="0" indent="0">
               <a:buNone/>
             </a:pPr>
             <a:r>
@@ -6669,220 +6415,9 @@
                 <a:ea typeface="Arial" pitchFamily="34" charset="-122"/>
                 <a:cs typeface="Arial" pitchFamily="34" charset="-120"/>
               </a:rPr>
-              <a:t>Path sensitivity to reduce false positives  |  </a:t>
-            </a:r>
-            <a:pPr indent="0" marL="0">
-              <a:buNone/>
-            </a:pPr>
-            <a:r>
-              <a:rPr lang="en-US" sz="1200" dirty="0">
-                <a:solidFill>
-                  <a:srgbClr val="0F172A"/>
-                </a:solidFill>
-                <a:latin typeface="Arial" pitchFamily="34" charset="0"/>
-                <a:ea typeface="Arial" pitchFamily="34" charset="-122"/>
-                <a:cs typeface="Arial" pitchFamily="34" charset="-120"/>
-              </a:rPr>
-              <a:t>Inter-procedural analysis with call graphs  |  </a:t>
-            </a:r>
-            <a:pPr indent="0" marL="0">
-              <a:buNone/>
-            </a:pPr>
-            <a:r>
-              <a:rPr lang="en-US" sz="1200" dirty="0">
-                <a:solidFill>
-                  <a:srgbClr val="0F172A"/>
-                </a:solidFill>
-                <a:latin typeface="Arial" pitchFamily="34" charset="0"/>
-                <a:ea typeface="Arial" pitchFamily="34" charset="-122"/>
-                <a:cs typeface="Arial" pitchFamily="34" charset="-120"/>
-              </a:rPr>
-              <a:t>Implicit flows (control dependencies)  |  </a:t>
-            </a:r>
-            <a:pPr indent="0" marL="0">
-              <a:buNone/>
-            </a:pPr>
-            <a:r>
-              <a:rPr lang="en-US" sz="1200" dirty="0">
-                <a:solidFill>
-                  <a:srgbClr val="0F172A"/>
-                </a:solidFill>
-                <a:latin typeface="Arial" pitchFamily="34" charset="0"/>
-                <a:ea typeface="Arial" pitchFamily="34" charset="-122"/>
-                <a:cs typeface="Arial" pitchFamily="34" charset="-120"/>
-              </a:rPr>
-              <a:t>Target real languages (JS, PHP)</a:t>
+              <a:t>Path sensitivity to reduce false positives  |  Inter-procedural analysis with call graphs  |  Implicit flows (control dependencies)  |  Target real languages (JS, PHP)</a:t>
             </a:r>
             <a:endParaRPr lang="en-US" sz="1200" dirty="0"/>
-          </a:p>
-        </p:txBody>
-      </p:sp>
-    </p:spTree>
-  </p:cSld>
-  <p:clrMapOvr>
-    <a:masterClrMapping/>
-  </p:clrMapOvr>
-</p:sld>
-</file>
-
-<file path=ppt/slides/slide8.xml><?xml version="1.0" encoding="utf-8"?>
-<p:sld xmlns:a="http://schemas.openxmlformats.org/drawingml/2006/main" xmlns:r="http://schemas.openxmlformats.org/officeDocument/2006/relationships" xmlns:p="http://schemas.openxmlformats.org/presentationml/2006/main">
-  <p:cSld name="Slide 8">
-    <p:bg>
-      <p:bgPr>
-        <a:solidFill>
-          <a:srgbClr val="1E2761"/>
-        </a:solidFill>
-      </p:bgPr>
-    </p:bg>
-    <p:spTree>
-      <p:nvGrpSpPr>
-        <p:cNvPr id="1" name=""/>
-        <p:cNvGrpSpPr/>
-        <p:nvPr/>
-      </p:nvGrpSpPr>
-      <p:grpSpPr>
-        <a:xfrm>
-          <a:off x="0" y="0"/>
-          <a:ext cx="0" cy="0"/>
-          <a:chOff x="0" y="0"/>
-          <a:chExt cx="0" cy="0"/>
-        </a:xfrm>
-      </p:grpSpPr>
-      <p:sp>
-        <p:nvSpPr>
-          <p:cNvPr id="2" name="Shape 0"/>
-          <p:cNvSpPr/>
-          <p:nvPr/>
-        </p:nvSpPr>
-        <p:spPr>
-          <a:xfrm>
-            <a:off x="0" y="3840480"/>
-            <a:ext cx="9144000" cy="1303020"/>
-          </a:xfrm>
-          <a:prstGeom prst="rect">
-            <a:avLst/>
-          </a:prstGeom>
-          <a:solidFill>
-            <a:srgbClr val="0F172A"/>
-          </a:solidFill>
-          <a:ln/>
-        </p:spPr>
-      </p:sp>
-      <p:sp>
-        <p:nvSpPr>
-          <p:cNvPr id="3" name="Text 1"/>
-          <p:cNvSpPr/>
-          <p:nvPr/>
-        </p:nvSpPr>
-        <p:spPr>
-          <a:xfrm>
-            <a:off x="731520" y="1371600"/>
-            <a:ext cx="7680960" cy="1097280"/>
-          </a:xfrm>
-          <a:prstGeom prst="rect">
-            <a:avLst/>
-          </a:prstGeom>
-          <a:noFill/>
-          <a:ln/>
-        </p:spPr>
-        <p:txBody>
-          <a:bodyPr wrap="square" rtlCol="0" anchor="ctr"/>
-          <a:lstStyle/>
-          <a:p>
-            <a:pPr algn="ctr" indent="0" marL="0">
-              <a:buNone/>
-            </a:pPr>
-            <a:r>
-              <a:rPr lang="en-US" sz="4400" b="1" dirty="0">
-                <a:solidFill>
-                  <a:srgbClr val="FFFFFF"/>
-                </a:solidFill>
-                <a:latin typeface="Arial Black" pitchFamily="34" charset="0"/>
-                <a:ea typeface="Arial Black" pitchFamily="34" charset="-122"/>
-                <a:cs typeface="Arial Black" pitchFamily="34" charset="-120"/>
-              </a:rPr>
-              <a:t>Questions?</a:t>
-            </a:r>
-            <a:endParaRPr lang="en-US" sz="4400" dirty="0"/>
-          </a:p>
-        </p:txBody>
-      </p:sp>
-      <p:sp>
-        <p:nvSpPr>
-          <p:cNvPr id="4" name="Text 2"/>
-          <p:cNvSpPr/>
-          <p:nvPr/>
-        </p:nvSpPr>
-        <p:spPr>
-          <a:xfrm>
-            <a:off x="731520" y="2468880"/>
-            <a:ext cx="7680960" cy="548640"/>
-          </a:xfrm>
-          <a:prstGeom prst="rect">
-            <a:avLst/>
-          </a:prstGeom>
-          <a:noFill/>
-          <a:ln/>
-        </p:spPr>
-        <p:txBody>
-          <a:bodyPr wrap="square" rtlCol="0" anchor="ctr"/>
-          <a:lstStyle/>
-          <a:p>
-            <a:pPr algn="ctr" indent="0" marL="0">
-              <a:buNone/>
-            </a:pPr>
-            <a:r>
-              <a:rPr lang="en-US" sz="1800" dirty="0">
-                <a:solidFill>
-                  <a:srgbClr val="CADCFC"/>
-                </a:solidFill>
-                <a:latin typeface="Arial" pitchFamily="34" charset="0"/>
-                <a:ea typeface="Arial" pitchFamily="34" charset="-122"/>
-                <a:cs typeface="Arial" pitchFamily="34" charset="-120"/>
-              </a:rPr>
-              <a:t>Static Taint Analysis for Web Vulnerabilities</a:t>
-            </a:r>
-            <a:endParaRPr lang="en-US" sz="1800" dirty="0"/>
-          </a:p>
-        </p:txBody>
-      </p:sp>
-      <p:sp>
-        <p:nvSpPr>
-          <p:cNvPr id="5" name="Text 3"/>
-          <p:cNvSpPr/>
-          <p:nvPr/>
-        </p:nvSpPr>
-        <p:spPr>
-          <a:xfrm>
-            <a:off x="731520" y="4114800"/>
-            <a:ext cx="7680960" cy="457200"/>
-          </a:xfrm>
-          <a:prstGeom prst="rect">
-            <a:avLst/>
-          </a:prstGeom>
-          <a:noFill/>
-          <a:ln/>
-        </p:spPr>
-        <p:txBody>
-          <a:bodyPr wrap="square" rtlCol="0" anchor="ctr"/>
-          <a:lstStyle/>
-          <a:p>
-            <a:pPr algn="ctr" indent="0" marL="0">
-              <a:buNone/>
-            </a:pPr>
-            <a:r>
-              <a:rPr lang="en-US" sz="1300" dirty="0">
-                <a:solidFill>
-                  <a:srgbClr val="CADCFC"/>
-                </a:solidFill>
-                <a:latin typeface="Arial" pitchFamily="34" charset="0"/>
-                <a:ea typeface="Arial" pitchFamily="34" charset="-122"/>
-                <a:cs typeface="Arial" pitchFamily="34" charset="-120"/>
-              </a:rPr>
-              <a:t>Built in OCaml  |  6 Test Cases  |  Sound Analysis  |  Zero Dependencies</a:t>
-            </a:r>
-            <a:endParaRPr lang="en-US" sz="1300" dirty="0"/>
           </a:p>
         </p:txBody>
       </p:sp>
@@ -7187,4 +6722,299 @@
     </a:ext>
   </a:extLst>
 </a:theme>
+</file>
+
+<file path=ppt/theme/theme2.xml><?xml version="1.0" encoding="utf-8"?>
+<a:theme xmlns:a="http://schemas.openxmlformats.org/drawingml/2006/main" name="Office Theme">
+  <a:themeElements>
+    <a:clrScheme name="Office">
+      <a:dk1>
+        <a:sysClr val="windowText" lastClr="000000"/>
+      </a:dk1>
+      <a:lt1>
+        <a:sysClr val="window" lastClr="FFFFFF"/>
+      </a:lt1>
+      <a:dk2>
+        <a:srgbClr val="44546A"/>
+      </a:dk2>
+      <a:lt2>
+        <a:srgbClr val="E7E6E6"/>
+      </a:lt2>
+      <a:accent1>
+        <a:srgbClr val="4472C4"/>
+      </a:accent1>
+      <a:accent2>
+        <a:srgbClr val="ED7D31"/>
+      </a:accent2>
+      <a:accent3>
+        <a:srgbClr val="A5A5A5"/>
+      </a:accent3>
+      <a:accent4>
+        <a:srgbClr val="FFC000"/>
+      </a:accent4>
+      <a:accent5>
+        <a:srgbClr val="5B9BD5"/>
+      </a:accent5>
+      <a:accent6>
+        <a:srgbClr val="70AD47"/>
+      </a:accent6>
+      <a:hlink>
+        <a:srgbClr val="0563C1"/>
+      </a:hlink>
+      <a:folHlink>
+        <a:srgbClr val="954F72"/>
+      </a:folHlink>
+    </a:clrScheme>
+    <a:fontScheme name="Office">
+      <a:majorFont>
+        <a:latin typeface="Calibri Light" panose="020F0302020204030204"/>
+        <a:ea typeface=""/>
+        <a:cs typeface=""/>
+        <a:font script="Jpan" typeface="游ゴシック Light"/>
+        <a:font script="Hang" typeface="맑은 고딕"/>
+        <a:font script="Hans" typeface="等线 Light"/>
+        <a:font script="Hant" typeface="新細明體"/>
+        <a:font script="Arab" typeface="Times New Roman"/>
+        <a:font script="Hebr" typeface="Times New Roman"/>
+        <a:font script="Thai" typeface="Angsana New"/>
+        <a:font script="Ethi" typeface="Nyala"/>
+        <a:font script="Beng" typeface="Vrinda"/>
+        <a:font script="Gujr" typeface="Shruti"/>
+        <a:font script="Khmr" typeface="MoolBoran"/>
+        <a:font script="Knda" typeface="Tunga"/>
+        <a:font script="Guru" typeface="Raavi"/>
+        <a:font script="Cans" typeface="Euphemia"/>
+        <a:font script="Cher" typeface="Plantagenet Cherokee"/>
+        <a:font script="Yiii" typeface="Microsoft Yi Baiti"/>
+        <a:font script="Tibt" typeface="Microsoft Himalaya"/>
+        <a:font script="Thaa" typeface="MV Boli"/>
+        <a:font script="Deva" typeface="Mangal"/>
+        <a:font script="Telu" typeface="Gautami"/>
+        <a:font script="Taml" typeface="Latha"/>
+        <a:font script="Syrc" typeface="Estrangelo Edessa"/>
+        <a:font script="Orya" typeface="Kalinga"/>
+        <a:font script="Mlym" typeface="Kartika"/>
+        <a:font script="Laoo" typeface="DokChampa"/>
+        <a:font script="Sinh" typeface="Iskoola Pota"/>
+        <a:font script="Mong" typeface="Mongolian Baiti"/>
+        <a:font script="Viet" typeface="Times New Roman"/>
+        <a:font script="Uigh" typeface="Microsoft Uighur"/>
+        <a:font script="Geor" typeface="Sylfaen"/>
+        <a:font script="Armn" typeface="Arial"/>
+        <a:font script="Bugi" typeface="Leelawadee UI"/>
+        <a:font script="Bopo" typeface="Microsoft JhengHei"/>
+        <a:font script="Java" typeface="Javanese Text"/>
+        <a:font script="Lisu" typeface="Segoe UI"/>
+        <a:font script="Mymr" typeface="Myanmar Text"/>
+        <a:font script="Nkoo" typeface="Ebrima"/>
+        <a:font script="Olck" typeface="Nirmala UI"/>
+        <a:font script="Osma" typeface="Ebrima"/>
+        <a:font script="Phag" typeface="Phagspa"/>
+        <a:font script="Syrn" typeface="Estrangelo Edessa"/>
+        <a:font script="Syrj" typeface="Estrangelo Edessa"/>
+        <a:font script="Syre" typeface="Estrangelo Edessa"/>
+        <a:font script="Sora" typeface="Nirmala UI"/>
+        <a:font script="Tale" typeface="Microsoft Tai Le"/>
+        <a:font script="Talu" typeface="Microsoft New Tai Lue"/>
+        <a:font script="Tfng" typeface="Ebrima"/>
+      </a:majorFont>
+      <a:minorFont>
+        <a:latin typeface="Calibri" panose="020F0502020204030204"/>
+        <a:ea typeface=""/>
+        <a:cs typeface=""/>
+        <a:font script="Jpan" typeface="游ゴシック"/>
+        <a:font script="Hang" typeface="맑은 고딕"/>
+        <a:font script="Hans" typeface="等线"/>
+        <a:font script="Hant" typeface="新細明體"/>
+        <a:font script="Arab" typeface="Arial"/>
+        <a:font script="Hebr" typeface="Arial"/>
+        <a:font script="Thai" typeface="Cordia New"/>
+        <a:font script="Ethi" typeface="Nyala"/>
+        <a:font script="Beng" typeface="Vrinda"/>
+        <a:font script="Gujr" typeface="Shruti"/>
+        <a:font script="Khmr" typeface="DaunPenh"/>
+        <a:font script="Knda" typeface="Tunga"/>
+        <a:font script="Guru" typeface="Raavi"/>
+        <a:font script="Cans" typeface="Euphemia"/>
+        <a:font script="Cher" typeface="Plantagenet Cherokee"/>
+        <a:font script="Yiii" typeface="Microsoft Yi Baiti"/>
+        <a:font script="Tibt" typeface="Microsoft Himalaya"/>
+        <a:font script="Thaa" typeface="MV Boli"/>
+        <a:font script="Deva" typeface="Mangal"/>
+        <a:font script="Telu" typeface="Gautami"/>
+        <a:font script="Taml" typeface="Latha"/>
+        <a:font script="Syrc" typeface="Estrangelo Edessa"/>
+        <a:font script="Orya" typeface="Kalinga"/>
+        <a:font script="Mlym" typeface="Kartika"/>
+        <a:font script="Laoo" typeface="DokChampa"/>
+        <a:font script="Sinh" typeface="Iskoola Pota"/>
+        <a:font script="Mong" typeface="Mongolian Baiti"/>
+        <a:font script="Viet" typeface="Arial"/>
+        <a:font script="Uigh" typeface="Microsoft Uighur"/>
+        <a:font script="Geor" typeface="Sylfaen"/>
+        <a:font script="Armn" typeface="Arial"/>
+        <a:font script="Bugi" typeface="Leelawadee UI"/>
+        <a:font script="Bopo" typeface="Microsoft JhengHei"/>
+        <a:font script="Java" typeface="Javanese Text"/>
+        <a:font script="Lisu" typeface="Segoe UI"/>
+        <a:font script="Mymr" typeface="Myanmar Text"/>
+        <a:font script="Nkoo" typeface="Ebrima"/>
+        <a:font script="Olck" typeface="Nirmala UI"/>
+        <a:font script="Osma" typeface="Ebrima"/>
+        <a:font script="Phag" typeface="Phagspa"/>
+        <a:font script="Syrn" typeface="Estrangelo Edessa"/>
+        <a:font script="Syrj" typeface="Estrangelo Edessa"/>
+        <a:font script="Syre" typeface="Estrangelo Edessa"/>
+        <a:font script="Sora" typeface="Nirmala UI"/>
+        <a:font script="Tale" typeface="Microsoft Tai Le"/>
+        <a:font script="Talu" typeface="Microsoft New Tai Lue"/>
+        <a:font script="Tfng" typeface="Ebrima"/>
+      </a:minorFont>
+    </a:fontScheme>
+    <a:fmtScheme name="Office">
+      <a:fillStyleLst>
+        <a:solidFill>
+          <a:schemeClr val="phClr"/>
+        </a:solidFill>
+        <a:gradFill rotWithShape="1">
+          <a:gsLst>
+            <a:gs pos="0">
+              <a:schemeClr val="phClr">
+                <a:lumMod val="110000"/>
+                <a:satMod val="105000"/>
+                <a:tint val="67000"/>
+              </a:schemeClr>
+            </a:gs>
+            <a:gs pos="50000">
+              <a:schemeClr val="phClr">
+                <a:lumMod val="105000"/>
+                <a:satMod val="103000"/>
+                <a:tint val="73000"/>
+              </a:schemeClr>
+            </a:gs>
+            <a:gs pos="100000">
+              <a:schemeClr val="phClr">
+                <a:lumMod val="105000"/>
+                <a:satMod val="109000"/>
+                <a:tint val="81000"/>
+              </a:schemeClr>
+            </a:gs>
+          </a:gsLst>
+          <a:lin ang="5400000" scaled="0"/>
+        </a:gradFill>
+        <a:gradFill rotWithShape="1">
+          <a:gsLst>
+            <a:gs pos="0">
+              <a:schemeClr val="phClr">
+                <a:satMod val="103000"/>
+                <a:lumMod val="102000"/>
+                <a:tint val="94000"/>
+              </a:schemeClr>
+            </a:gs>
+            <a:gs pos="50000">
+              <a:schemeClr val="phClr">
+                <a:satMod val="110000"/>
+                <a:lumMod val="100000"/>
+                <a:shade val="100000"/>
+              </a:schemeClr>
+            </a:gs>
+            <a:gs pos="100000">
+              <a:schemeClr val="phClr">
+                <a:lumMod val="99000"/>
+                <a:satMod val="120000"/>
+                <a:shade val="78000"/>
+              </a:schemeClr>
+            </a:gs>
+          </a:gsLst>
+          <a:lin ang="5400000" scaled="0"/>
+        </a:gradFill>
+      </a:fillStyleLst>
+      <a:lnStyleLst>
+        <a:ln w="6350" cap="flat" cmpd="sng" algn="ctr">
+          <a:solidFill>
+            <a:schemeClr val="phClr"/>
+          </a:solidFill>
+          <a:prstDash val="solid"/>
+          <a:miter lim="800000"/>
+        </a:ln>
+        <a:ln w="12700" cap="flat" cmpd="sng" algn="ctr">
+          <a:solidFill>
+            <a:schemeClr val="phClr"/>
+          </a:solidFill>
+          <a:prstDash val="solid"/>
+          <a:miter lim="800000"/>
+        </a:ln>
+        <a:ln w="19050" cap="flat" cmpd="sng" algn="ctr">
+          <a:solidFill>
+            <a:schemeClr val="phClr"/>
+          </a:solidFill>
+          <a:prstDash val="solid"/>
+          <a:miter lim="800000"/>
+        </a:ln>
+      </a:lnStyleLst>
+      <a:effectStyleLst>
+        <a:effectStyle>
+          <a:effectLst/>
+        </a:effectStyle>
+        <a:effectStyle>
+          <a:effectLst/>
+        </a:effectStyle>
+        <a:effectStyle>
+          <a:effectLst>
+            <a:outerShdw blurRad="57150" dist="19050" dir="5400000" algn="ctr" rotWithShape="0">
+              <a:srgbClr val="000000">
+                <a:alpha val="63000"/>
+              </a:srgbClr>
+            </a:outerShdw>
+          </a:effectLst>
+        </a:effectStyle>
+      </a:effectStyleLst>
+      <a:bgFillStyleLst>
+        <a:solidFill>
+          <a:schemeClr val="phClr"/>
+        </a:solidFill>
+        <a:solidFill>
+          <a:schemeClr val="phClr">
+            <a:tint val="95000"/>
+            <a:satMod val="170000"/>
+          </a:schemeClr>
+        </a:solidFill>
+        <a:gradFill rotWithShape="1">
+          <a:gsLst>
+            <a:gs pos="0">
+              <a:schemeClr val="phClr">
+                <a:tint val="93000"/>
+                <a:satMod val="150000"/>
+                <a:shade val="98000"/>
+                <a:lumMod val="102000"/>
+              </a:schemeClr>
+            </a:gs>
+            <a:gs pos="50000">
+              <a:schemeClr val="phClr">
+                <a:tint val="98000"/>
+                <a:satMod val="130000"/>
+                <a:shade val="90000"/>
+                <a:lumMod val="103000"/>
+              </a:schemeClr>
+            </a:gs>
+            <a:gs pos="100000">
+              <a:schemeClr val="phClr">
+                <a:shade val="63000"/>
+                <a:satMod val="120000"/>
+              </a:schemeClr>
+            </a:gs>
+          </a:gsLst>
+          <a:lin ang="5400000" scaled="0"/>
+        </a:gradFill>
+      </a:bgFillStyleLst>
+    </a:fmtScheme>
+  </a:themeElements>
+  <a:objectDefaults/>
+  <a:extraClrSchemeLst/>
+  <a:extLst>
+    <a:ext uri="{05A4C25C-085E-4340-85A3-A5531E510DB2}">
+      <thm15:themeFamily xmlns:thm15="http://schemas.microsoft.com/office/thememl/2012/main" name="Office Theme" id="{62F939B6-93AF-4DB8-9C6B-D6C7DFDC589F}" vid="{4A3C46E8-61CC-4603-A589-7422A47A8E4A}"/>
+    </a:ext>
+  </a:extLst>
+</a:theme>
 </file>